--- a/Analise_City_2021.pptx
+++ b/Analise_City_2021.pptx
@@ -8435,7 +8435,7 @@
             <a:tbl>
               <a:tblPr>
                 <a:noFill/>
-                <a:tableStyleId>{9807A26C-9364-4652-A618-B381ADB56B7E}</a:tableStyleId>
+                <a:tableStyleId>{ED6BE9DC-E15B-4B2B-A48B-3F1839405588}</a:tableStyleId>
               </a:tblPr>
               <a:tblGrid>
                 <a:gridCol w="2560325"/>
@@ -22552,8 +22552,8 @@
         </p:blipFill>
         <p:spPr>
           <a:xfrm>
-            <a:off x="411475" y="888275"/>
-            <a:ext cx="5547201" cy="4049951"/>
+            <a:off x="601975" y="932925"/>
+            <a:ext cx="5417826" cy="3915174"/>
           </a:xfrm>
           <a:prstGeom prst="rect">
             <a:avLst/>
